--- a/lessons/lesson01/python_intro.pptx
+++ b/lessons/lesson01/python_intro.pptx
@@ -7416,7 +7416,7 @@
               <a:rPr lang="ru-RU" altLang="ru-RU" dirty="0">
                 <a:sym typeface="+mn-ea"/>
               </a:rPr>
-              <a:t>Статическая типизация</a:t>
+              <a:t>Динамическая типизация</a:t>
             </a:r>
             <a:endParaRPr lang="ru-RU" altLang="ru-RU" dirty="0">
               <a:sym typeface="+mn-ea"/>
